--- a/wiki/project/shared/Board-Presentation-Sweetgreen.pptx
+++ b/wiki/project/shared/Board-Presentation-Sweetgreen.pptx
@@ -10574,6 +10574,10 @@
           </a:solidFill>
           <a:ln/>
         </p:spPr>
+        <p:txBody>
+          <a:bodyPr/>
+          <a:p/>
+        </p:txBody>
       </p:sp>
       <p:sp>
         <p:nvSpPr>
@@ -10649,6 +10653,10 @@
           </a:solidFill>
           <a:ln/>
         </p:spPr>
+        <p:txBody>
+          <a:bodyPr/>
+          <a:p/>
+        </p:txBody>
       </p:sp>
       <p:sp>
         <p:nvSpPr>
@@ -10842,6 +10850,10 @@
             <a:prstDash val="solid"/>
           </a:ln>
         </p:spPr>
+        <p:txBody>
+          <a:bodyPr/>
+          <a:p/>
+        </p:txBody>
       </p:sp>
       <p:sp>
         <p:nvSpPr>
@@ -10906,6 +10918,10 @@
             <a:prstDash val="solid"/>
           </a:ln>
         </p:spPr>
+        <p:txBody>
+          <a:bodyPr/>
+          <a:p/>
+        </p:txBody>
       </p:sp>
       <p:sp>
         <p:nvSpPr>
@@ -10926,6 +10942,10 @@
           </a:solidFill>
           <a:ln/>
         </p:spPr>
+        <p:txBody>
+          <a:bodyPr/>
+          <a:p/>
+        </p:txBody>
       </p:sp>
       <p:sp>
         <p:nvSpPr>
@@ -11073,7 +11093,7 @@
       </p:sp>
       <p:pic>
         <p:nvPicPr>
-          <p:cNvPr id="14" name="Picture 13" descr="Order-and-Payment-Process-Map-Diagram-Only.png"/>
+          <p:cNvPr id="17" name="Picture 16" descr="Order-and-Payment-Swimlane.png"/>
           <p:cNvPicPr>
             <a:picLocks noChangeAspect="1"/>
           </p:cNvPicPr>
@@ -11087,8 +11107,8 @@
         </p:blipFill>
         <p:spPr>
           <a:xfrm>
-            <a:off x="457200" y="2286000"/>
-            <a:ext cx="1963051" cy="4014000"/>
+            <a:off x="457200" y="2240280"/>
+            <a:ext cx="6949440" cy="3322092"/>
           </a:xfrm>
           <a:prstGeom prst="rect">
             <a:avLst/>
@@ -11097,136 +11117,68 @@
       </p:pic>
       <p:sp>
         <p:nvSpPr>
-          <p:cNvPr id="15" name="TextBox 14"/>
+          <p:cNvPr id="18" name="TextBox 17"/>
           <p:cNvSpPr txBox="1"/>
           <p:nvPr/>
         </p:nvSpPr>
         <p:spPr>
           <a:xfrm>
-            <a:off x="2740251" y="2386000"/>
-            <a:ext cx="5509389" cy="1350000"/>
-          </a:xfrm>
-          <a:prstGeom prst="rect">
-            <a:avLst/>
-          </a:prstGeom>
-          <a:noFill/>
-        </p:spPr>
-        <p:txBody>
-          <a:bodyPr wrap="square" lIns="0" rIns="0" tIns="0" bIns="0">
+            <a:off x="457200" y="5699532"/>
+            <a:ext cx="7589520" cy="457200"/>
+          </a:xfrm>
+          <a:prstGeom prst="rect">
+            <a:avLst/>
+          </a:prstGeom>
+          <a:noFill/>
+        </p:spPr>
+        <p:txBody>
+          <a:bodyPr wrap="square">
             <a:spAutoFit/>
           </a:bodyPr>
           <a:lstStyle/>
           <a:p>
-            <a:r>
-              <a:rPr sz="8000" b="1" i="0">
-                <a:solidFill>
-                  <a:srgbClr val="57068C"/>
-                </a:solidFill>
-                <a:latin typeface="Cambria"/>
-              </a:rPr>
-              <a:t>$44</a:t>
-            </a:r>
-          </a:p>
-        </p:txBody>
-      </p:sp>
-      <p:sp>
-        <p:nvSpPr>
-          <p:cNvPr id="16" name="TextBox 15"/>
+            <a:pPr algn="l"/>
+            <a:r>
+              <a:rPr sz="1300" b="1" i="0">
+                <a:solidFill>
+                  <a:srgbClr val="581C87"/>
+                </a:solidFill>
+              </a:rPr>
+              <a:t>6 of 30 synthetic orders (20%)  ·  $44 modeled exposure  ·  18.7 min average lateness</a:t>
+            </a:r>
+          </a:p>
+        </p:txBody>
+      </p:sp>
+      <p:sp>
+        <p:nvSpPr>
+          <p:cNvPr id="19" name="TextBox 18"/>
           <p:cNvSpPr txBox="1"/>
           <p:nvPr/>
         </p:nvSpPr>
         <p:spPr>
           <a:xfrm>
-            <a:off x="2740251" y="3756000"/>
-            <a:ext cx="5509389" cy="380000"/>
-          </a:xfrm>
-          <a:prstGeom prst="rect">
-            <a:avLst/>
-          </a:prstGeom>
-          <a:noFill/>
-        </p:spPr>
-        <p:txBody>
-          <a:bodyPr wrap="square" lIns="0" rIns="0" tIns="0" bIns="0">
+            <a:off x="457200" y="6047004"/>
+            <a:ext cx="7589520" cy="502920"/>
+          </a:xfrm>
+          <a:prstGeom prst="rect">
+            <a:avLst/>
+          </a:prstGeom>
+          <a:noFill/>
+        </p:spPr>
+        <p:txBody>
+          <a:bodyPr wrap="square">
             <a:spAutoFit/>
           </a:bodyPr>
           <a:lstStyle/>
           <a:p>
-            <a:r>
-              <a:rPr sz="1800" b="0" i="1">
-                <a:solidFill>
-                  <a:srgbClr val="666666"/>
-                </a:solidFill>
-                <a:latin typeface="Calibri"/>
-              </a:rPr>
-              <a:t>in modeled exposure</a:t>
-            </a:r>
-          </a:p>
-        </p:txBody>
-      </p:sp>
-      <p:sp>
-        <p:nvSpPr>
-          <p:cNvPr id="17" name="TextBox 16"/>
-          <p:cNvSpPr txBox="1"/>
-          <p:nvPr/>
-        </p:nvSpPr>
-        <p:spPr>
-          <a:xfrm>
-            <a:off x="2740251" y="4356000"/>
-            <a:ext cx="5509389" cy="700000"/>
-          </a:xfrm>
-          <a:prstGeom prst="rect">
-            <a:avLst/>
-          </a:prstGeom>
-          <a:noFill/>
-        </p:spPr>
-        <p:txBody>
-          <a:bodyPr wrap="square" lIns="0" rIns="0" tIns="0" bIns="0">
-            <a:spAutoFit/>
-          </a:bodyPr>
-          <a:lstStyle/>
-          <a:p>
-            <a:r>
-              <a:rPr sz="1600" b="1" i="0">
-                <a:solidFill>
-                  <a:srgbClr val="333333"/>
-                </a:solidFill>
-                <a:latin typeface="Calibri"/>
-              </a:rPr>
-              <a:t>6 of 30 synthetic orders  ·  20% rework rate  ·  18.7 min average lateness</a:t>
-            </a:r>
-          </a:p>
-        </p:txBody>
-      </p:sp>
-      <p:sp>
-        <p:nvSpPr>
-          <p:cNvPr id="18" name="TextBox 17"/>
-          <p:cNvSpPr txBox="1"/>
-          <p:nvPr/>
-        </p:nvSpPr>
-        <p:spPr>
-          <a:xfrm>
-            <a:off x="2740251" y="5256000"/>
-            <a:ext cx="5509389" cy="900000"/>
-          </a:xfrm>
-          <a:prstGeom prst="rect">
-            <a:avLst/>
-          </a:prstGeom>
-          <a:noFill/>
-        </p:spPr>
-        <p:txBody>
-          <a:bodyPr wrap="square" lIns="0" rIns="0" tIns="0" bIns="0">
-            <a:spAutoFit/>
-          </a:bodyPr>
-          <a:lstStyle/>
-          <a:p>
-            <a:r>
-              <a:rPr sz="1500" b="0" i="0">
-                <a:solidFill>
-                  <a:srgbClr val="333333"/>
-                </a:solidFill>
-                <a:latin typeface="Calibri"/>
-              </a:rPr>
-              <a:t>Live vs. nightly-cached availability data disagree at the kitchen feasibility check (②), the exact seam where digital ordering meets kitchen execution.</a:t>
+            <a:pPr algn="l"/>
+            <a:r>
+              <a:rPr sz="1050" b="0" i="0">
+                <a:solidFill>
+                  <a:srgbClr val="334155"/>
+                </a:solidFill>
+              </a:rPr>
+              <a:t>Live vs. nightly-cached availability data disagree at the kitchen feasibility check (②) — the exact seam where digital ordering meets kitchen execution.</a:t>
             </a:r>
           </a:p>
         </p:txBody>
@@ -11282,6 +11234,10 @@
           </a:solidFill>
           <a:ln/>
         </p:spPr>
+        <p:txBody>
+          <a:bodyPr/>
+          <a:p/>
+        </p:txBody>
       </p:sp>
       <p:sp>
         <p:nvSpPr>
@@ -11357,6 +11313,10 @@
           </a:solidFill>
           <a:ln/>
         </p:spPr>
+        <p:txBody>
+          <a:bodyPr/>
+          <a:p/>
+        </p:txBody>
       </p:sp>
       <p:sp>
         <p:nvSpPr>
@@ -11550,6 +11510,10 @@
             <a:prstDash val="solid"/>
           </a:ln>
         </p:spPr>
+        <p:txBody>
+          <a:bodyPr/>
+          <a:p/>
+        </p:txBody>
       </p:sp>
       <p:sp>
         <p:nvSpPr>
@@ -11614,6 +11578,10 @@
             <a:prstDash val="solid"/>
           </a:ln>
         </p:spPr>
+        <p:txBody>
+          <a:bodyPr/>
+          <a:p/>
+        </p:txBody>
       </p:sp>
       <p:sp>
         <p:nvSpPr>
@@ -11634,6 +11602,10 @@
           </a:solidFill>
           <a:ln/>
         </p:spPr>
+        <p:txBody>
+          <a:bodyPr/>
+          <a:p/>
+        </p:txBody>
       </p:sp>
       <p:sp>
         <p:nvSpPr>
@@ -11781,240 +11753,335 @@
       </p:sp>
       <p:sp>
         <p:nvSpPr>
-          <p:cNvPr id="14" name="Text 12"/>
-          <p:cNvSpPr/>
-          <p:nvPr/>
-        </p:nvSpPr>
-        <p:spPr>
-          <a:xfrm>
-            <a:off x="457200" y="2286000"/>
-            <a:ext cx="7772400" cy="2286000"/>
-          </a:xfrm>
-          <a:prstGeom prst="rect">
-            <a:avLst/>
-          </a:prstGeom>
-          <a:noFill/>
-          <a:ln/>
-        </p:spPr>
-        <p:txBody>
-          <a:bodyPr wrap="square" rtlCol="0" anchor="t"/>
-          <a:lstStyle/>
-          <a:p>
-            <a:pPr algn="l" marL="228600" indent="-228600">
-              <a:lnSpc>
-                <a:spcPct val="105000"/>
-              </a:lnSpc>
-              <a:spcAft>
-                <a:spcPts val="800"/>
-              </a:spcAft>
-              <a:buSzPct val="100000"/>
-              <a:buChar char="•"/>
-            </a:pPr>
-            <a:r>
-              <a:rPr lang="en-US" sz="1600" dirty="0">
-                <a:solidFill>
-                  <a:srgbClr val="5A5A5A"/>
-                </a:solidFill>
-                <a:latin typeface="Arial" pitchFamily="34" charset="0"/>
-                <a:ea typeface="Arial" pitchFamily="34" charset="-122"/>
-                <a:cs typeface="Arial" pitchFamily="34" charset="-120"/>
-              </a:rPr>
-              <a:t>Top RPA candidates (from your Week 4 scan)</a:t>
-            </a:r>
-            <a:endParaRPr lang="en-US" sz="1600" dirty="0"/>
-          </a:p>
-          <a:p>
-            <a:pPr algn="l" marL="228600" indent="-228600">
-              <a:lnSpc>
-                <a:spcPct val="105000"/>
-              </a:lnSpc>
-              <a:spcAft>
-                <a:spcPts val="800"/>
-              </a:spcAft>
-              <a:buSzPct val="100000"/>
-              <a:buChar char="•"/>
-            </a:pPr>
-            <a:r>
-              <a:rPr lang="en-US" sz="1600" dirty="0">
-                <a:solidFill>
-                  <a:srgbClr val="5A5A5A"/>
-                </a:solidFill>
-                <a:latin typeface="Arial" pitchFamily="34" charset="0"/>
-                <a:ea typeface="Arial" pitchFamily="34" charset="-122"/>
-                <a:cs typeface="Arial" pitchFamily="34" charset="-120"/>
-              </a:rPr>
-              <a:t>Why each qualifies — repetitive, rules-based, high-volume</a:t>
-            </a:r>
-            <a:endParaRPr lang="en-US" sz="1600" dirty="0"/>
-          </a:p>
-          <a:p>
-            <a:pPr algn="l" marL="228600" indent="-228600">
-              <a:lnSpc>
-                <a:spcPct val="105000"/>
-              </a:lnSpc>
-              <a:spcAft>
-                <a:spcPts val="800"/>
-              </a:spcAft>
-              <a:buSzPct val="100000"/>
-              <a:buChar char="•"/>
-            </a:pPr>
-            <a:r>
-              <a:rPr lang="en-US" sz="1600" dirty="0">
-                <a:solidFill>
-                  <a:srgbClr val="5A5A5A"/>
-                </a:solidFill>
-                <a:latin typeface="Arial" pitchFamily="34" charset="0"/>
-                <a:ea typeface="Arial" pitchFamily="34" charset="-122"/>
-                <a:cs typeface="Arial" pitchFamily="34" charset="-120"/>
-              </a:rPr>
-              <a:t>Where automation adds the most value</a:t>
-            </a:r>
-            <a:endParaRPr lang="en-US" sz="1600" dirty="0"/>
-          </a:p>
-        </p:txBody>
-      </p:sp>
-      <p:sp>
-        <p:nvSpPr>
-          <p:cNvPr id="15" name="Shape 13"/>
-          <p:cNvSpPr/>
-          <p:nvPr/>
-        </p:nvSpPr>
-        <p:spPr>
-          <a:xfrm>
-            <a:off x="457200" y="4709160"/>
-            <a:ext cx="7772400" cy="841248"/>
+          <p:cNvPr id="17" name="Rounded Rectangle 16"/>
+          <p:cNvSpPr/>
+          <p:nvPr/>
+        </p:nvSpPr>
+        <p:spPr>
+          <a:xfrm>
+            <a:off x="457200" y="2240280"/>
+            <a:ext cx="3657600" cy="3794760"/>
           </a:xfrm>
           <a:prstGeom prst="roundRect">
-            <a:avLst>
-              <a:gd name="adj" fmla="val 6522"/>
-            </a:avLst>
+            <a:avLst/>
           </a:prstGeom>
           <a:solidFill>
-            <a:srgbClr val="F3ECF9"/>
+            <a:srgbClr val="FFF3D6"/>
           </a:solidFill>
-          <a:ln w="9525">
+          <a:ln w="6350">
             <a:solidFill>
-              <a:srgbClr val="9A6ABA"/>
+              <a:srgbClr val="E2E8F0"/>
             </a:solidFill>
-            <a:prstDash val="solid"/>
           </a:ln>
-        </p:spPr>
-      </p:sp>
-      <p:sp>
-        <p:nvSpPr>
-          <p:cNvPr id="16" name="Shape 14"/>
-          <p:cNvSpPr/>
-          <p:nvPr/>
-        </p:nvSpPr>
-        <p:spPr>
-          <a:xfrm>
-            <a:off x="457200" y="4709160"/>
-            <a:ext cx="64008" cy="841248"/>
-          </a:xfrm>
-          <a:prstGeom prst="rect">
+          <a:effectLst/>
+        </p:spPr>
+        <p:style>
+          <a:lnRef idx="1">
+            <a:schemeClr val="accent1"/>
+          </a:lnRef>
+          <a:fillRef idx="3">
+            <a:schemeClr val="accent1"/>
+          </a:fillRef>
+          <a:effectRef idx="2">
+            <a:schemeClr val="accent1"/>
+          </a:effectRef>
+          <a:fontRef idx="minor">
+            <a:schemeClr val="lt1"/>
+          </a:fontRef>
+        </p:style>
+        <p:txBody>
+          <a:bodyPr rtlCol="0" anchor="ctr"/>
+          <a:lstStyle/>
+          <a:p>
+            <a:pPr algn="ctr"/>
+          </a:p>
+        </p:txBody>
+      </p:sp>
+      <p:sp>
+        <p:nvSpPr>
+          <p:cNvPr id="18" name="TextBox 17"/>
+          <p:cNvSpPr txBox="1"/>
+          <p:nvPr/>
+        </p:nvSpPr>
+        <p:spPr>
+          <a:xfrm>
+            <a:off x="621792" y="2377440"/>
+            <a:ext cx="3328416" cy="320040"/>
+          </a:xfrm>
+          <a:prstGeom prst="rect">
+            <a:avLst/>
+          </a:prstGeom>
+          <a:noFill/>
+        </p:spPr>
+        <p:txBody>
+          <a:bodyPr wrap="square">
+            <a:spAutoFit/>
+          </a:bodyPr>
+          <a:lstStyle/>
+          <a:p>
+            <a:pPr algn="l"/>
+            <a:r>
+              <a:rPr sz="1300" b="1" i="0">
+                <a:solidFill>
+                  <a:srgbClr val="B7791F"/>
+                </a:solidFill>
+              </a:rPr>
+              <a:t>D2 — Feasible? (live vs. cached)</a:t>
+            </a:r>
+          </a:p>
+        </p:txBody>
+      </p:sp>
+      <p:sp>
+        <p:nvSpPr>
+          <p:cNvPr id="19" name="TextBox 18"/>
+          <p:cNvSpPr txBox="1"/>
+          <p:nvPr/>
+        </p:nvSpPr>
+        <p:spPr>
+          <a:xfrm>
+            <a:off x="621792" y="2679192"/>
+            <a:ext cx="3328416" cy="274320"/>
+          </a:xfrm>
+          <a:prstGeom prst="rect">
+            <a:avLst/>
+          </a:prstGeom>
+          <a:noFill/>
+        </p:spPr>
+        <p:txBody>
+          <a:bodyPr wrap="square">
+            <a:spAutoFit/>
+          </a:bodyPr>
+          <a:lstStyle/>
+          <a:p>
+            <a:pPr algn="l"/>
+            <a:r>
+              <a:rPr sz="1050" b="1" i="0">
+                <a:solidFill>
+                  <a:srgbClr val="334155"/>
+                </a:solidFill>
+              </a:rPr>
+              <a:t>→ RPA · Lab 2 (Make)</a:t>
+            </a:r>
+          </a:p>
+        </p:txBody>
+      </p:sp>
+      <p:sp>
+        <p:nvSpPr>
+          <p:cNvPr id="20" name="TextBox 19"/>
+          <p:cNvSpPr txBox="1"/>
+          <p:nvPr/>
+        </p:nvSpPr>
+        <p:spPr>
+          <a:xfrm>
+            <a:off x="621792" y="3017520"/>
+            <a:ext cx="3328416" cy="2880360"/>
+          </a:xfrm>
+          <a:prstGeom prst="rect">
+            <a:avLst/>
+          </a:prstGeom>
+          <a:noFill/>
+        </p:spPr>
+        <p:txBody>
+          <a:bodyPr wrap="square">
+            <a:spAutoFit/>
+          </a:bodyPr>
+          <a:lstStyle/>
+          <a:p>
+            <a:pPr algn="l"/>
+            <a:r>
+              <a:rPr sz="1000" b="0" i="0">
+                <a:solidFill>
+                  <a:srgbClr val="334155"/>
+                </a:solidFill>
+              </a:rPr>
+              <a:t>Repetitive: every order passes through it. Rules-based: approve when live and cached availability agree and the customization is supported, else hold. Stable: the rule and its two source systems (Olo, Crunchtime) rarely change.
+Thread: Operations, also Cash and Customer.
+Prize: 6 of 30 synthetic orders (20%) hit the mismatch — $44 modeled exposure, 18.7 min late on average.</a:t>
+            </a:r>
+          </a:p>
+        </p:txBody>
+      </p:sp>
+      <p:sp>
+        <p:nvSpPr>
+          <p:cNvPr id="21" name="Rounded Rectangle 20"/>
+          <p:cNvSpPr/>
+          <p:nvPr/>
+        </p:nvSpPr>
+        <p:spPr>
+          <a:xfrm>
+            <a:off x="4343400" y="2240280"/>
+            <a:ext cx="3794760" cy="3794760"/>
+          </a:xfrm>
+          <a:prstGeom prst="roundRect">
             <a:avLst/>
           </a:prstGeom>
           <a:solidFill>
-            <a:srgbClr val="6B2FA0"/>
+            <a:srgbClr val="F3E8FF"/>
           </a:solidFill>
-          <a:ln/>
-        </p:spPr>
-      </p:sp>
-      <p:sp>
-        <p:nvSpPr>
-          <p:cNvPr id="17" name="Text 15"/>
-          <p:cNvSpPr/>
-          <p:nvPr/>
-        </p:nvSpPr>
-        <p:spPr>
-          <a:xfrm>
-            <a:off x="658368" y="4764024"/>
-            <a:ext cx="7406640" cy="731520"/>
-          </a:xfrm>
-          <a:prstGeom prst="rect">
-            <a:avLst/>
-          </a:prstGeom>
-          <a:noFill/>
-          <a:ln/>
-        </p:spPr>
-        <p:txBody>
-          <a:bodyPr wrap="square" rtlCol="0" anchor="ctr"/>
-          <a:lstStyle/>
-          <a:p>
-            <a:pPr algn="l" indent="0" marL="0">
-              <a:lnSpc>
-                <a:spcPct val="100000"/>
-              </a:lnSpc>
-              <a:buNone/>
-            </a:pPr>
-            <a:r>
-              <a:rPr lang="en-US" sz="1100" b="1" spc="100" kern="0" dirty="0">
-                <a:solidFill>
-                  <a:srgbClr val="6B2FA0"/>
-                </a:solidFill>
-                <a:latin typeface="Arial" pitchFamily="34" charset="0"/>
-                <a:ea typeface="Arial" pitchFamily="34" charset="-122"/>
-                <a:cs typeface="Arial" pitchFamily="34" charset="-120"/>
-              </a:rPr>
-              <a:t>◆  VISUAL IDEA   </a:t>
-            </a:r>
-            <a:pPr algn="l" indent="0" marL="0">
-              <a:lnSpc>
-                <a:spcPct val="100000"/>
-              </a:lnSpc>
-              <a:buNone/>
-            </a:pPr>
-            <a:r>
-              <a:rPr lang="en-US" sz="1200" i="1" dirty="0">
-                <a:solidFill>
-                  <a:srgbClr val="333333"/>
-                </a:solidFill>
-                <a:latin typeface="Arial" pitchFamily="34" charset="0"/>
-                <a:ea typeface="Arial" pitchFamily="34" charset="-122"/>
-                <a:cs typeface="Arial" pitchFamily="34" charset="-120"/>
-              </a:rPr>
-              <a:t>A 2×2 (volume × rule-stability) or a ranked bar makes your RPA priorities obvious at a glance.</a:t>
-            </a:r>
-            <a:endParaRPr lang="en-US" sz="1100" dirty="0"/>
-          </a:p>
-        </p:txBody>
-      </p:sp>
-      <p:sp>
-        <p:nvSpPr>
-          <p:cNvPr id="18" name="Text 16"/>
-          <p:cNvSpPr/>
-          <p:nvPr/>
-        </p:nvSpPr>
-        <p:spPr>
-          <a:xfrm>
-            <a:off x="457200" y="5623560"/>
-            <a:ext cx="7772400" cy="320040"/>
-          </a:xfrm>
-          <a:prstGeom prst="rect">
-            <a:avLst/>
-          </a:prstGeom>
-          <a:noFill/>
-          <a:ln/>
-        </p:spPr>
-        <p:txBody>
-          <a:bodyPr wrap="square" rtlCol="0" anchor="ctr"/>
-          <a:lstStyle/>
-          <a:p>
-            <a:pPr algn="l" indent="0" marL="0">
-              <a:buNone/>
-            </a:pPr>
-            <a:r>
-              <a:rPr lang="en-US" sz="1100" i="1" dirty="0">
-                <a:solidFill>
-                  <a:srgbClr val="5A5A5A"/>
-                </a:solidFill>
-                <a:latin typeface="Arial" pitchFamily="34" charset="0"/>
-                <a:ea typeface="Arial" pitchFamily="34" charset="-122"/>
-                <a:cs typeface="Arial" pitchFamily="34" charset="-120"/>
-              </a:rPr>
-              <a:t>These are the points to make — show them however lands best: a diagram, chart, image, or a few words. Be creative.</a:t>
-            </a:r>
-            <a:endParaRPr lang="en-US" sz="1100" dirty="0"/>
+          <a:ln w="6350">
+            <a:solidFill>
+              <a:srgbClr val="E2E8F0"/>
+            </a:solidFill>
+          </a:ln>
+          <a:effectLst/>
+        </p:spPr>
+        <p:style>
+          <a:lnRef idx="1">
+            <a:schemeClr val="accent1"/>
+          </a:lnRef>
+          <a:fillRef idx="3">
+            <a:schemeClr val="accent1"/>
+          </a:fillRef>
+          <a:effectRef idx="2">
+            <a:schemeClr val="accent1"/>
+          </a:effectRef>
+          <a:fontRef idx="minor">
+            <a:schemeClr val="lt1"/>
+          </a:fontRef>
+        </p:style>
+        <p:txBody>
+          <a:bodyPr rtlCol="0" anchor="ctr"/>
+          <a:lstStyle/>
+          <a:p>
+            <a:pPr algn="ctr"/>
+          </a:p>
+        </p:txBody>
+      </p:sp>
+      <p:sp>
+        <p:nvSpPr>
+          <p:cNvPr id="22" name="TextBox 21"/>
+          <p:cNvSpPr txBox="1"/>
+          <p:nvPr/>
+        </p:nvSpPr>
+        <p:spPr>
+          <a:xfrm>
+            <a:off x="4507992" y="2377440"/>
+            <a:ext cx="3474720" cy="320040"/>
+          </a:xfrm>
+          <a:prstGeom prst="rect">
+            <a:avLst/>
+          </a:prstGeom>
+          <a:noFill/>
+        </p:spPr>
+        <p:txBody>
+          <a:bodyPr wrap="square">
+            <a:spAutoFit/>
+          </a:bodyPr>
+          <a:lstStyle/>
+          <a:p>
+            <a:pPr algn="l"/>
+            <a:r>
+              <a:rPr sz="1300" b="1" i="0">
+                <a:solidFill>
+                  <a:srgbClr val="7E22CE"/>
+                </a:solidFill>
+              </a:rPr>
+              <a:t>D3 — Recovery agreed?</a:t>
+            </a:r>
+          </a:p>
+        </p:txBody>
+      </p:sp>
+      <p:sp>
+        <p:nvSpPr>
+          <p:cNvPr id="23" name="TextBox 22"/>
+          <p:cNvSpPr txBox="1"/>
+          <p:nvPr/>
+        </p:nvSpPr>
+        <p:spPr>
+          <a:xfrm>
+            <a:off x="4507992" y="2679192"/>
+            <a:ext cx="3474720" cy="274320"/>
+          </a:xfrm>
+          <a:prstGeom prst="rect">
+            <a:avLst/>
+          </a:prstGeom>
+          <a:noFill/>
+        </p:spPr>
+        <p:txBody>
+          <a:bodyPr wrap="square">
+            <a:spAutoFit/>
+          </a:bodyPr>
+          <a:lstStyle/>
+          <a:p>
+            <a:pPr algn="l"/>
+            <a:r>
+              <a:rPr sz="1050" b="1" i="0">
+                <a:solidFill>
+                  <a:srgbClr val="334155"/>
+                </a:solidFill>
+              </a:rPr>
+              <a:t>→ AI agent · Lab 3, Week 9</a:t>
+            </a:r>
+          </a:p>
+        </p:txBody>
+      </p:sp>
+      <p:sp>
+        <p:nvSpPr>
+          <p:cNvPr id="24" name="TextBox 23"/>
+          <p:cNvSpPr txBox="1"/>
+          <p:nvPr/>
+        </p:nvSpPr>
+        <p:spPr>
+          <a:xfrm>
+            <a:off x="4507992" y="3017520"/>
+            <a:ext cx="3474720" cy="2880360"/>
+          </a:xfrm>
+          <a:prstGeom prst="rect">
+            <a:avLst/>
+          </a:prstGeom>
+          <a:noFill/>
+        </p:spPr>
+        <p:txBody>
+          <a:bodyPr wrap="square">
+            <a:spAutoFit/>
+          </a:bodyPr>
+          <a:lstStyle/>
+          <a:p>
+            <a:pPr algn="l"/>
+            <a:r>
+              <a:rPr sz="1000" b="0" i="0">
+                <a:solidFill>
+                  <a:srgbClr val="334155"/>
+                </a:solidFill>
+              </a:rPr>
+              <a:t>Repetitive: every exception reaches it. Rules-based: no — two reasonable staff members could offer different resolutions to the same customer; depends on urgency, prep ETA, and consent.
+This is the judgment step: an assistant can recommend a recovery option for manager review, but it can't make the customer's choice.
+Previewed now, built once intelligent automation (W7) and agent design (W8) are covered.</a:t>
+            </a:r>
+          </a:p>
+        </p:txBody>
+      </p:sp>
+      <p:sp>
+        <p:nvSpPr>
+          <p:cNvPr id="25" name="TextBox 24"/>
+          <p:cNvSpPr txBox="1"/>
+          <p:nvPr/>
+        </p:nvSpPr>
+        <p:spPr>
+          <a:xfrm>
+            <a:off x="457200" y="6172200"/>
+            <a:ext cx="7589520" cy="457200"/>
+          </a:xfrm>
+          <a:prstGeom prst="rect">
+            <a:avLst/>
+          </a:prstGeom>
+          <a:noFill/>
+        </p:spPr>
+        <p:txBody>
+          <a:bodyPr wrap="square">
+            <a:spAutoFit/>
+          </a:bodyPr>
+          <a:lstStyle/>
+          <a:p>
+            <a:pPr algn="l"/>
+            <a:r>
+              <a:rPr sz="950" b="0" i="1">
+                <a:solidFill>
+                  <a:srgbClr val="64748B"/>
+                </a:solidFill>
+              </a:rPr>
+              <a:t>Also scanned and rejected: order-acceptance criteria beyond payment (underspecified rule), the kitchen quality gate (not screen-readable), and the stock-accuracy root cause (a redesign question, not an RPA one).</a:t>
+            </a:r>
           </a:p>
         </p:txBody>
       </p:sp>
